--- a/examples/playground/_out/01_editorial_data_story.pptx
+++ b/examples/playground/_out/01_editorial_data_story.pptx
@@ -3529,12 +3529,12 @@
               </a:defRPr>
             </a:pPr>
             <a:r>
-              <a:rPr sz="7000" b="1" i="0">
+              <a:rPr sz="6200" b="1" i="0">
                 <a:latin typeface="DejaVu Serif"/>
               </a:rPr>
               <a:t>The Quiet Reordering of the Global Coffee Trade</a:t>
             </a:r>
-            <a:endParaRPr sz="7000" b="1" i="0">
+            <a:endParaRPr sz="6200" b="1" i="0">
               <a:latin typeface="DejaVu Serif"/>
             </a:endParaRPr>
           </a:p>
